--- a/yunqi-2026-agenda-201/docs/洞察一页-06-容器智算底座助力生数科技多模态 AI.pptx
+++ b/yunqi-2026-agenda-201/docs/洞察一页-06-容器智算底座助力生数科技多模态 AI.pptx
@@ -3141,7 +3141,7 @@
         <p:spPr>
           <a:xfrm>
             <a:off x="0" y="0"/>
-            <a:ext cx="12191695" cy="1051560"/>
+            <a:ext cx="12191695" cy="1097280"/>
           </a:xfrm>
           <a:prstGeom prst="rect">
             <a:avLst/>
@@ -3183,8 +3183,8 @@
         </p:nvSpPr>
         <p:spPr>
           <a:xfrm>
-            <a:off x="365760" y="146304"/>
-            <a:ext cx="11430000" cy="274320"/>
+            <a:off x="320040" y="91440"/>
+            <a:ext cx="11521440" cy="237744"/>
           </a:xfrm>
           <a:prstGeom prst="rect">
             <a:avLst/>
@@ -3199,7 +3199,7 @@
           <a:p>
             <a:pPr algn="l"/>
             <a:r>
-              <a:rPr sz="1300" b="0">
+              <a:rPr sz="1200" b="0">
                 <a:solidFill>
                   <a:srgbClr val="6B6B6B"/>
                 </a:solidFill>
@@ -3219,8 +3219,8 @@
         </p:nvSpPr>
         <p:spPr>
           <a:xfrm>
-            <a:off x="365760" y="420624"/>
-            <a:ext cx="11430000" cy="502920"/>
+            <a:off x="320040" y="347472"/>
+            <a:ext cx="11521440" cy="658368"/>
           </a:xfrm>
           <a:prstGeom prst="rect">
             <a:avLst/>
@@ -3235,14 +3235,14 @@
           <a:p>
             <a:pPr algn="l"/>
             <a:r>
-              <a:rPr sz="2000" b="1">
+              <a:rPr sz="1600" b="1">
                 <a:solidFill>
                   <a:srgbClr val="1A1A1A"/>
                 </a:solidFill>
                 <a:latin typeface="Microsoft YaHei"/>
                 <a:ea typeface="Microsoft YaHei"/>
               </a:rPr>
-              <a:t>洞察：超节点（M890 类）必须配套拓扑 Gang、DRA Channel 隔离与秒级自愈，否则硬件…</a:t>
+              <a:t>洞察：超节点（M890 类）必须配套拓扑 Gang、DRA Channel 隔离与秒级自愈，否则硬件规格无法转化为 Goodput。</a:t>
             </a:r>
           </a:p>
         </p:txBody>
@@ -3255,8 +3255,8 @@
         </p:nvSpPr>
         <p:spPr>
           <a:xfrm>
-            <a:off x="320040" y="1207008"/>
-            <a:ext cx="11521440" cy="502920"/>
+            <a:off x="274320" y="1207008"/>
+            <a:ext cx="11612880" cy="749808"/>
           </a:xfrm>
           <a:prstGeom prst="rect">
             <a:avLst/>
@@ -3300,8 +3300,8 @@
         </p:nvSpPr>
         <p:spPr>
           <a:xfrm>
-            <a:off x="457200" y="1298448"/>
-            <a:ext cx="11247120" cy="365760"/>
+            <a:off x="411480" y="1261872"/>
+            <a:ext cx="11338560" cy="640080"/>
           </a:xfrm>
           <a:prstGeom prst="rect">
             <a:avLst/>
@@ -3316,14 +3316,14 @@
           <a:p>
             <a:pPr algn="l"/>
             <a:r>
-              <a:rPr sz="1300" b="1">
+              <a:rPr sz="1200" b="1">
                 <a:solidFill>
                   <a:srgbClr val="1A1A1A"/>
                 </a:solidFill>
                 <a:latin typeface="Microsoft YaHei"/>
                 <a:ea typeface="Microsoft YaHei"/>
               </a:rPr>
-              <a:t>一句话判断：本场为容器智算底座与生数科技联合实践：ACK 侧给出真武 M890 超节点调度/DRA/可观测/自愈、PD 分离推理套件、异构故障自愈与多模型 GPU 热切换能力；生数侧介绍 Vidu/Motusion 通用世界模型路…</a:t>
+              <a:t>一句话判断：本场为容器智算底座与生数科技联合实践：ACK 侧给出真武 M890 超节点调度/DRA/可观测/自愈、PD 分离推理套件、异构故障自愈与多模型 GPU 热切换能力；生数侧介绍 Vidu/Motusion 通用世界模型路线，以及基于 ACK Pro + ACS Serverless 的多地域训推调度平台（服务启动 SLO 15 秒、首帧时延可观测），并以高峰弹性、模型切换、GPU 故障与多集群调度四大挑战收束。</a:t>
             </a:r>
           </a:p>
         </p:txBody>
@@ -3336,8 +3336,8 @@
         </p:nvSpPr>
         <p:spPr>
           <a:xfrm>
-            <a:off x="320040" y="1874519"/>
-            <a:ext cx="3703320" cy="2606040"/>
+            <a:off x="274320" y="2084831"/>
+            <a:ext cx="3749039" cy="2267712"/>
           </a:xfrm>
           <a:prstGeom prst="rect">
             <a:avLst/>
@@ -3381,8 +3381,8 @@
         </p:nvSpPr>
         <p:spPr>
           <a:xfrm>
-            <a:off x="457200" y="2011679"/>
-            <a:ext cx="3429000" cy="320040"/>
+            <a:off x="402336" y="2176271"/>
+            <a:ext cx="3493007" cy="292608"/>
           </a:xfrm>
           <a:prstGeom prst="rect">
             <a:avLst/>
@@ -3397,14 +3397,14 @@
           <a:p>
             <a:pPr algn="l"/>
             <a:r>
-              <a:rPr sz="1500" b="1">
+              <a:rPr sz="1400" b="1">
                 <a:solidFill>
                   <a:srgbClr val="8B1A2B"/>
                 </a:solidFill>
                 <a:latin typeface="Microsoft YaHei"/>
                 <a:ea typeface="Microsoft YaHei"/>
               </a:rPr>
-              <a:t>01  ACK 支持真武 M890：拓…</a:t>
+              <a:t>01  ACK 支持真武 M890</a:t>
             </a:r>
           </a:p>
         </p:txBody>
@@ -3417,8 +3417,8 @@
         </p:nvSpPr>
         <p:spPr>
           <a:xfrm>
-            <a:off x="484632" y="2377439"/>
-            <a:ext cx="3374136" cy="1965960"/>
+            <a:off x="402336" y="2487167"/>
+            <a:ext cx="3493007" cy="1764792"/>
           </a:xfrm>
           <a:prstGeom prst="rect">
             <a:avLst/>
@@ -3433,69 +3433,69 @@
           <a:p>
             <a:pPr algn="l">
               <a:spcAft>
-                <a:spcPts val="400"/>
+                <a:spcPts val="200"/>
               </a:spcAft>
             </a:pPr>
             <a:r>
-              <a:rPr sz="1200" b="1">
+              <a:rPr sz="1100" b="1">
                 <a:solidFill>
                   <a:srgbClr val="1A1A1A"/>
                 </a:solidFill>
                 <a:latin typeface="Microsoft YaHei"/>
                 <a:ea typeface="Microsoft YaHei"/>
               </a:rPr>
-              <a:t>灵骏节点池统一纳管：PoD → ASW 交换域 → 超节点 → 子节点；真武 M8…</a:t>
+              <a:t>HCS 超节点/AI 集群规划需把拓扑亲和 Gang 调度与 DRA/CDI 多 Channel 隔离做成默认能力，而不是事后人工绑核</a:t>
             </a:r>
           </a:p>
           <a:p>
             <a:pPr algn="l">
               <a:spcAft>
-                <a:spcPts val="400"/>
+                <a:spcPts val="200"/>
               </a:spcAft>
             </a:pPr>
             <a:r>
-              <a:rPr sz="1200" b="0">
+              <a:rPr sz="1100" b="0">
                 <a:solidFill>
                   <a:srgbClr val="4A4A4A"/>
                 </a:solidFill>
                 <a:latin typeface="Microsoft YaHei"/>
                 <a:ea typeface="Microsoft YaHei"/>
               </a:rPr>
-              <a:t>• 拓扑感知调度：Binpack + Gang（PodGroup），超节点内按 2/4/8 等分卡选位，同任务 Worker 同超节点亲和。</a:t>
+              <a:t>• 灵骏节点池统一纳管：PoD → ASW 交换域 → 超节点 → 子节点</a:t>
             </a:r>
           </a:p>
           <a:p>
             <a:pPr algn="l">
               <a:spcAft>
-                <a:spcPts val="400"/>
+                <a:spcPts val="200"/>
               </a:spcAft>
             </a:pPr>
             <a:r>
-              <a:rPr sz="1200" b="0">
+              <a:rPr sz="1100" b="0">
                 <a:solidFill>
                   <a:srgbClr val="4A4A4A"/>
                 </a:solidFill>
                 <a:latin typeface="Microsoft YaHei"/>
                 <a:ea typeface="Microsoft YaHei"/>
               </a:rPr>
-              <a:t>• DRA · 多 Channel 调度/隔离：任务独立通信 Channel，CDI 注入设备，故障域从整超节点收敛到任务 Channel。</a:t>
+              <a:t>• 拓扑感知调度：Binpack + Gang（PodGroup），超节点内按 2/4/8 等分卡选位，同任务 Worker 同超节点亲和</a:t>
             </a:r>
           </a:p>
           <a:p>
             <a:pPr algn="l">
               <a:spcAft>
-                <a:spcPts val="400"/>
+                <a:spcPts val="200"/>
               </a:spcAft>
             </a:pPr>
             <a:r>
-              <a:rPr sz="1200" b="0">
+              <a:rPr sz="1100" b="0">
                 <a:solidFill>
                   <a:srgbClr val="4A4A4A"/>
                 </a:solidFill>
                 <a:latin typeface="Microsoft YaHei"/>
                 <a:ea typeface="Microsoft YaHei"/>
               </a:rPr>
-              <a:t>• 深度可观测：80+ Prometheus 指标、容器/算子级归因、AI Profiling；超节点秒级感知 ECC/互联/XID，隔离…</a:t>
+              <a:t>• DRA · 多 Channel 调度/隔离：任务独立通信 Channel，CDI 注入设备，故障域从整超节点收敛到任务 Channel</a:t>
             </a:r>
           </a:p>
         </p:txBody>
@@ -3508,8 +3508,8 @@
         </p:nvSpPr>
         <p:spPr>
           <a:xfrm>
-            <a:off x="4224528" y="1874519"/>
-            <a:ext cx="3703320" cy="2606040"/>
+            <a:off x="4187951" y="2084831"/>
+            <a:ext cx="3749039" cy="2267712"/>
           </a:xfrm>
           <a:prstGeom prst="rect">
             <a:avLst/>
@@ -3553,8 +3553,8 @@
         </p:nvSpPr>
         <p:spPr>
           <a:xfrm>
-            <a:off x="4361688" y="2011679"/>
-            <a:ext cx="3429000" cy="320040"/>
+            <a:off x="4315967" y="2176271"/>
+            <a:ext cx="3493007" cy="292608"/>
           </a:xfrm>
           <a:prstGeom prst="rect">
             <a:avLst/>
@@ -3569,14 +3569,14 @@
           <a:p>
             <a:pPr algn="l"/>
             <a:r>
-              <a:rPr sz="1500" b="1">
+              <a:rPr sz="1400" b="1">
                 <a:solidFill>
                   <a:srgbClr val="8B1A2B"/>
                 </a:solidFill>
                 <a:latin typeface="Microsoft YaHei"/>
                 <a:ea typeface="Microsoft YaHei"/>
               </a:rPr>
-              <a:t>02  ACK AI 推理套件 + 真…</a:t>
+              <a:t>02  PD 分离与前缀感知路由</a:t>
             </a:r>
           </a:p>
         </p:txBody>
@@ -3589,8 +3589,8 @@
         </p:nvSpPr>
         <p:spPr>
           <a:xfrm>
-            <a:off x="4389120" y="2377439"/>
-            <a:ext cx="3374136" cy="1965960"/>
+            <a:off x="4315967" y="2487167"/>
+            <a:ext cx="3493007" cy="1764792"/>
           </a:xfrm>
           <a:prstGeom prst="rect">
             <a:avLst/>
@@ -3605,52 +3605,69 @@
           <a:p>
             <a:pPr algn="l">
               <a:spcAft>
-                <a:spcPts val="400"/>
+                <a:spcPts val="200"/>
               </a:spcAft>
             </a:pPr>
             <a:r>
-              <a:rPr sz="1200" b="1">
+              <a:rPr sz="1100" b="1">
                 <a:solidFill>
                   <a:srgbClr val="1A1A1A"/>
                 </a:solidFill>
                 <a:latin typeface="Microsoft YaHei"/>
                 <a:ea typeface="Microsoft YaHei"/>
               </a:rPr>
-              <a:t>RBG 角色编排：Segment 内 2P:1D 亲和，段内 KV Cache 直…</a:t>
+              <a:t>HCS 推理产品应把 PD 分离 + Session/前缀感知路由做成一等公民，对外暴露 KV 命中率/TTFT/会话 SLO</a:t>
             </a:r>
           </a:p>
           <a:p>
             <a:pPr algn="l">
               <a:spcAft>
-                <a:spcPts val="400"/>
+                <a:spcPts val="200"/>
               </a:spcAft>
             </a:pPr>
             <a:r>
-              <a:rPr sz="1200" b="0">
+              <a:rPr sz="1100" b="0">
                 <a:solidFill>
                   <a:srgbClr val="4A4A4A"/>
                 </a:solidFill>
                 <a:latin typeface="Microsoft YaHei"/>
                 <a:ea typeface="Microsoft YaHei"/>
               </a:rPr>
-              <a:t>• ACK 推理网关：最长前缀优先、跨实例共享、KV 分层加载；负载感知队列深度/KV 占用/活跃请求，权衡命中收益与等待成本。</a:t>
+              <a:t>• RBG 角色编排：Segment 内 2P:1D 亲和，段内 KV Cache 直传</a:t>
             </a:r>
           </a:p>
           <a:p>
             <a:pPr algn="l">
               <a:spcAft>
-                <a:spcPts val="400"/>
+                <a:spcPts val="200"/>
               </a:spcAft>
             </a:pPr>
             <a:r>
-              <a:rPr sz="1200" b="0">
+              <a:rPr sz="1100" b="0">
                 <a:solidFill>
                   <a:srgbClr val="4A4A4A"/>
                 </a:solidFill>
                 <a:latin typeface="Microsoft YaHei"/>
                 <a:ea typeface="Microsoft YaHei"/>
               </a:rPr>
-              <a:t>• 指标驱动扩缩：Prefill 看队列等待与 TTFT；Decode 看 batch/TPOT/KV 占用；预置 Token 吞吐、TT…</a:t>
+              <a:t>• ACK 推理网关：最长前缀优先、跨实例共享、KV 分层加载</a:t>
+            </a:r>
+          </a:p>
+          <a:p>
+            <a:pPr algn="l">
+              <a:spcAft>
+                <a:spcPts val="200"/>
+              </a:spcAft>
+            </a:pPr>
+            <a:r>
+              <a:rPr sz="1100" b="0">
+                <a:solidFill>
+                  <a:srgbClr val="4A4A4A"/>
+                </a:solidFill>
+                <a:latin typeface="Microsoft YaHei"/>
+                <a:ea typeface="Microsoft YaHei"/>
+              </a:rPr>
+              <a:t>• 指标驱动扩缩：Prefill 看队列等待与 TTFT</a:t>
             </a:r>
           </a:p>
         </p:txBody>
@@ -3663,8 +3680,8 @@
         </p:nvSpPr>
         <p:spPr>
           <a:xfrm>
-            <a:off x="8129016" y="1874519"/>
-            <a:ext cx="3703320" cy="2606040"/>
+            <a:off x="8101582" y="2084831"/>
+            <a:ext cx="3749039" cy="2267712"/>
           </a:xfrm>
           <a:prstGeom prst="rect">
             <a:avLst/>
@@ -3708,8 +3725,8 @@
         </p:nvSpPr>
         <p:spPr>
           <a:xfrm>
-            <a:off x="8266176" y="2011679"/>
-            <a:ext cx="3429000" cy="320040"/>
+            <a:off x="8229598" y="2176271"/>
+            <a:ext cx="3493007" cy="292608"/>
           </a:xfrm>
           <a:prstGeom prst="rect">
             <a:avLst/>
@@ -3724,14 +3741,14 @@
           <a:p>
             <a:pPr algn="l"/>
             <a:r>
-              <a:rPr sz="1500" b="1">
+              <a:rPr sz="1400" b="1">
                 <a:solidFill>
                   <a:srgbClr val="8B1A2B"/>
                 </a:solidFill>
                 <a:latin typeface="Microsoft YaHei"/>
                 <a:ea typeface="Microsoft YaHei"/>
               </a:rPr>
-              <a:t>03  ACK 异构算力故障自愈：以 …</a:t>
+              <a:t>03  以 Goodput 为目标</a:t>
             </a:r>
           </a:p>
         </p:txBody>
@@ -3744,8 +3761,8 @@
         </p:nvSpPr>
         <p:spPr>
           <a:xfrm>
-            <a:off x="8293608" y="2377439"/>
-            <a:ext cx="3374136" cy="1965960"/>
+            <a:off x="8229598" y="2487167"/>
+            <a:ext cx="3493007" cy="1764792"/>
           </a:xfrm>
           <a:prstGeom prst="rect">
             <a:avLst/>
@@ -3760,28 +3777,45 @@
           <a:p>
             <a:pPr algn="l">
               <a:spcAft>
-                <a:spcPts val="400"/>
+                <a:spcPts val="200"/>
               </a:spcAft>
             </a:pPr>
             <a:r>
-              <a:rPr sz="1200" b="1">
+              <a:rPr sz="1100" b="1">
                 <a:solidFill>
                   <a:srgbClr val="1A1A1A"/>
                 </a:solidFill>
                 <a:latin typeface="Microsoft YaHei"/>
                 <a:ea typeface="Microsoft YaHei"/>
               </a:rPr>
-              <a:t>五层架构：信源（ECS/灵骏/超节点 CMS、GPU Xid/ECC、Kubele…</a:t>
+              <a:t>HCS 应将 Goodput 纳入 AI 集群运维 KPI，并把多源硬件事件统一映射为 K8s Condition</a:t>
             </a:r>
           </a:p>
           <a:p>
             <a:pPr algn="l">
               <a:spcAft>
-                <a:spcPts val="400"/>
+                <a:spcPts val="200"/>
               </a:spcAft>
             </a:pPr>
             <a:r>
-              <a:rPr sz="1200" b="0">
+              <a:rPr sz="1100" b="0">
+                <a:solidFill>
+                  <a:srgbClr val="4A4A4A"/>
+                </a:solidFill>
+                <a:latin typeface="Microsoft YaHei"/>
+                <a:ea typeface="Microsoft YaHei"/>
+              </a:rPr>
+              <a:t>• 五层架构：信源（ECS/灵骏/超节点 CMS、GPU Xid/ECC、Kubelet）→ 检测转换（统一故障语义、主动探测）→ 可视化告警 → 编排授权（RepairPlan、分级授权、限流熔断）→ 执行（卡/机隔离、排水、修复、回池）</a:t>
+            </a:r>
+          </a:p>
+          <a:p>
+            <a:pPr algn="l">
+              <a:spcAft>
+                <a:spcPts val="200"/>
+              </a:spcAft>
+            </a:pPr>
+            <a:r>
+              <a:rPr sz="1100" b="0">
                 <a:solidFill>
                   <a:srgbClr val="4A4A4A"/>
                 </a:solidFill>
@@ -3794,18 +3828,18 @@
           <a:p>
             <a:pPr algn="l">
               <a:spcAft>
-                <a:spcPts val="400"/>
+                <a:spcPts val="200"/>
               </a:spcAft>
             </a:pPr>
             <a:r>
-              <a:rPr sz="1200" b="0">
+              <a:rPr sz="1100" b="0">
                 <a:solidFill>
                   <a:srgbClr val="4A4A4A"/>
                 </a:solidFill>
                 <a:latin typeface="Microsoft YaHei"/>
                 <a:ea typeface="Microsoft YaHei"/>
               </a:rPr>
-              <a:t>• 原生 K8s Condition 映射，业务零改代码；覆盖 ECS/EGS/灵骏/超节点；支持卡级隔离。客户实践含生数科技。</a:t>
+              <a:t>• 原生 K8s Condition 映射，业务零改代码</a:t>
             </a:r>
           </a:p>
         </p:txBody>
@@ -3818,8 +3852,8 @@
         </p:nvSpPr>
         <p:spPr>
           <a:xfrm>
-            <a:off x="320040" y="4617720"/>
-            <a:ext cx="7315200" cy="256032"/>
+            <a:off x="274320" y="4553712"/>
+            <a:ext cx="7315200" cy="237744"/>
           </a:xfrm>
           <a:prstGeom prst="rect">
             <a:avLst/>
@@ -3834,7 +3868,7 @@
           <a:p>
             <a:pPr algn="l"/>
             <a:r>
-              <a:rPr sz="1400" b="1">
+              <a:rPr sz="1300" b="1">
                 <a:solidFill>
                   <a:srgbClr val="1A1A1A"/>
                 </a:solidFill>
@@ -3854,8 +3888,8 @@
         </p:nvSpPr>
         <p:spPr>
           <a:xfrm>
-            <a:off x="320040" y="4910328"/>
-            <a:ext cx="1847088" cy="868680"/>
+            <a:off x="274320" y="4809744"/>
+            <a:ext cx="1874519" cy="960120"/>
           </a:xfrm>
           <a:prstGeom prst="rect">
             <a:avLst/>
@@ -3899,8 +3933,8 @@
         </p:nvSpPr>
         <p:spPr>
           <a:xfrm>
-            <a:off x="429768" y="4965192"/>
-            <a:ext cx="1664208" cy="201168"/>
+            <a:off x="365760" y="4864608"/>
+            <a:ext cx="1709927" cy="201168"/>
           </a:xfrm>
           <a:prstGeom prst="rect">
             <a:avLst/>
@@ -3922,7 +3956,7 @@
                 <a:latin typeface="Microsoft YaHei"/>
                 <a:ea typeface="Microsoft YaHei"/>
               </a:rPr>
-              <a:t>ACK 支持真武 M8…</a:t>
+              <a:t>ACK 支持真武 M890</a:t>
             </a:r>
           </a:p>
         </p:txBody>
@@ -3935,8 +3969,8 @@
         </p:nvSpPr>
         <p:spPr>
           <a:xfrm>
-            <a:off x="429768" y="5166360"/>
-            <a:ext cx="1664208" cy="237744"/>
+            <a:off x="365760" y="5065776"/>
+            <a:ext cx="1709927" cy="256032"/>
           </a:xfrm>
           <a:prstGeom prst="rect">
             <a:avLst/>
@@ -3958,7 +3992,7 @@
                 <a:latin typeface="Microsoft YaHei"/>
                 <a:ea typeface="Microsoft YaHei"/>
               </a:rPr>
-              <a:t>ICN Link 800Gb/s</a:t>
+              <a:t>演讲口径</a:t>
             </a:r>
           </a:p>
         </p:txBody>
@@ -3971,8 +4005,8 @@
         </p:nvSpPr>
         <p:spPr>
           <a:xfrm>
-            <a:off x="429768" y="5413248"/>
-            <a:ext cx="1664208" cy="292608"/>
+            <a:off x="365760" y="5340096"/>
+            <a:ext cx="1709927" cy="365760"/>
           </a:xfrm>
           <a:prstGeom prst="rect">
             <a:avLst/>
@@ -3987,7 +4021,7 @@
           <a:p>
             <a:pPr algn="l"/>
             <a:r>
-              <a:rPr sz="1400" b="1">
+              <a:rPr sz="1200" b="1">
                 <a:solidFill>
                   <a:srgbClr val="8B1A2B"/>
                 </a:solidFill>
@@ -4007,8 +4041,8 @@
         </p:nvSpPr>
         <p:spPr>
           <a:xfrm>
-            <a:off x="2276856" y="4910328"/>
-            <a:ext cx="1847088" cy="868680"/>
+            <a:off x="2240279" y="4809744"/>
+            <a:ext cx="1874519" cy="960120"/>
           </a:xfrm>
           <a:prstGeom prst="rect">
             <a:avLst/>
@@ -4052,8 +4086,8 @@
         </p:nvSpPr>
         <p:spPr>
           <a:xfrm>
-            <a:off x="2386584" y="4965192"/>
-            <a:ext cx="1664208" cy="201168"/>
+            <a:off x="2331719" y="4864608"/>
+            <a:ext cx="1709927" cy="201168"/>
           </a:xfrm>
           <a:prstGeom prst="rect">
             <a:avLst/>
@@ -4075,7 +4109,7 @@
                 <a:latin typeface="Microsoft YaHei"/>
                 <a:ea typeface="Microsoft YaHei"/>
               </a:rPr>
-              <a:t>ACK AI 推理套件…</a:t>
+              <a:t>ACK 支持真武 M890·2</a:t>
             </a:r>
           </a:p>
         </p:txBody>
@@ -4088,8 +4122,8 @@
         </p:nvSpPr>
         <p:spPr>
           <a:xfrm>
-            <a:off x="2386584" y="5166360"/>
-            <a:ext cx="1664208" cy="237744"/>
+            <a:off x="2331719" y="5065776"/>
+            <a:ext cx="1709927" cy="256032"/>
           </a:xfrm>
           <a:prstGeom prst="rect">
             <a:avLst/>
@@ -4111,7 +4145,7 @@
                 <a:latin typeface="Microsoft YaHei"/>
                 <a:ea typeface="Microsoft YaHei"/>
               </a:rPr>
-              <a:t>KV Cache 命中率：40…</a:t>
+              <a:t>演讲口径</a:t>
             </a:r>
           </a:p>
         </p:txBody>
@@ -4124,8 +4158,8 @@
         </p:nvSpPr>
         <p:spPr>
           <a:xfrm>
-            <a:off x="2386584" y="5413248"/>
-            <a:ext cx="1664208" cy="292608"/>
+            <a:off x="2331719" y="5340096"/>
+            <a:ext cx="1709927" cy="365760"/>
           </a:xfrm>
           <a:prstGeom prst="rect">
             <a:avLst/>
@@ -4140,14 +4174,14 @@
           <a:p>
             <a:pPr algn="l"/>
             <a:r>
-              <a:rPr sz="1400" b="1">
+              <a:rPr sz="1200" b="1">
                 <a:solidFill>
                   <a:srgbClr val="8B1A2B"/>
                 </a:solidFill>
                 <a:latin typeface="Microsoft YaHei"/>
                 <a:ea typeface="Microsoft YaHei"/>
               </a:rPr>
-              <a:t>同资源吞吐约 3x（相对开源）</a:t>
+              <a:t>ICN Link 800Gb/s</a:t>
             </a:r>
           </a:p>
         </p:txBody>
@@ -4160,8 +4194,8 @@
         </p:nvSpPr>
         <p:spPr>
           <a:xfrm>
-            <a:off x="4233672" y="4910328"/>
-            <a:ext cx="1847088" cy="868680"/>
+            <a:off x="4206238" y="4809744"/>
+            <a:ext cx="1874519" cy="960120"/>
           </a:xfrm>
           <a:prstGeom prst="rect">
             <a:avLst/>
@@ -4205,8 +4239,8 @@
         </p:nvSpPr>
         <p:spPr>
           <a:xfrm>
-            <a:off x="4343400" y="4965192"/>
-            <a:ext cx="1664208" cy="201168"/>
+            <a:off x="4297678" y="4864608"/>
+            <a:ext cx="1709927" cy="201168"/>
           </a:xfrm>
           <a:prstGeom prst="rect">
             <a:avLst/>
@@ -4228,7 +4262,7 @@
                 <a:latin typeface="Microsoft YaHei"/>
                 <a:ea typeface="Microsoft YaHei"/>
               </a:rPr>
-              <a:t>ACK 异构算力故障自…</a:t>
+              <a:t>ACK 支持真武 M890·3</a:t>
             </a:r>
           </a:p>
         </p:txBody>
@@ -4241,8 +4275,8 @@
         </p:nvSpPr>
         <p:spPr>
           <a:xfrm>
-            <a:off x="4343400" y="5166360"/>
-            <a:ext cx="1664208" cy="237744"/>
+            <a:off x="4297678" y="5065776"/>
+            <a:ext cx="1709927" cy="256032"/>
           </a:xfrm>
           <a:prstGeom prst="rect">
             <a:avLst/>
@@ -4264,7 +4298,7 @@
                 <a:latin typeface="Microsoft YaHei"/>
                 <a:ea typeface="Microsoft YaHei"/>
               </a:rPr>
-              <a:t>卡级隔离：单坏卡不废整机</a:t>
+              <a:t>演讲口径</a:t>
             </a:r>
           </a:p>
         </p:txBody>
@@ -4277,8 +4311,8 @@
         </p:nvSpPr>
         <p:spPr>
           <a:xfrm>
-            <a:off x="4343400" y="5413248"/>
-            <a:ext cx="1664208" cy="292608"/>
+            <a:off x="4297678" y="5340096"/>
+            <a:ext cx="1709927" cy="365760"/>
           </a:xfrm>
           <a:prstGeom prst="rect">
             <a:avLst/>
@@ -4293,14 +4327,14 @@
           <a:p>
             <a:pPr algn="l"/>
             <a:r>
-              <a:rPr sz="1400" b="1">
+              <a:rPr sz="1200" b="1">
                 <a:solidFill>
                   <a:srgbClr val="8B1A2B"/>
                 </a:solidFill>
                 <a:latin typeface="Microsoft YaHei"/>
                 <a:ea typeface="Microsoft YaHei"/>
               </a:rPr>
-              <a:t>卡级隔离：单坏卡不废整机</a:t>
+              <a:t>80+ 标准 Prometheus 指标</a:t>
             </a:r>
           </a:p>
         </p:txBody>
@@ -4313,8 +4347,8 @@
         </p:nvSpPr>
         <p:spPr>
           <a:xfrm>
-            <a:off x="6190488" y="4910328"/>
-            <a:ext cx="1847088" cy="868680"/>
+            <a:off x="6172197" y="4809744"/>
+            <a:ext cx="1874519" cy="960120"/>
           </a:xfrm>
           <a:prstGeom prst="rect">
             <a:avLst/>
@@ -4358,8 +4392,8 @@
         </p:nvSpPr>
         <p:spPr>
           <a:xfrm>
-            <a:off x="6300216" y="4965192"/>
-            <a:ext cx="1664208" cy="201168"/>
+            <a:off x="6263637" y="4864608"/>
+            <a:ext cx="1709927" cy="201168"/>
           </a:xfrm>
           <a:prstGeom prst="rect">
             <a:avLst/>
@@ -4381,7 +4415,7 @@
                 <a:latin typeface="Microsoft YaHei"/>
                 <a:ea typeface="Microsoft YaHei"/>
               </a:rPr>
-              <a:t>多模型 on GPU …</a:t>
+              <a:t>ACK 支持真武 M890·4</a:t>
             </a:r>
           </a:p>
         </p:txBody>
@@ -4394,8 +4428,8 @@
         </p:nvSpPr>
         <p:spPr>
           <a:xfrm>
-            <a:off x="6300216" y="5166360"/>
-            <a:ext cx="1664208" cy="237744"/>
+            <a:off x="6263637" y="5065776"/>
+            <a:ext cx="1709927" cy="256032"/>
           </a:xfrm>
           <a:prstGeom prst="rect">
             <a:avLst/>
@@ -4417,7 +4451,7 @@
                 <a:latin typeface="Microsoft YaHei"/>
                 <a:ea typeface="Microsoft YaHei"/>
               </a:rPr>
-              <a:t>27B：1.34s vs 29…</a:t>
+              <a:t>演讲口径</a:t>
             </a:r>
           </a:p>
         </p:txBody>
@@ -4430,8 +4464,8 @@
         </p:nvSpPr>
         <p:spPr>
           <a:xfrm>
-            <a:off x="6300216" y="5413248"/>
-            <a:ext cx="1664208" cy="292608"/>
+            <a:off x="6263637" y="5340096"/>
+            <a:ext cx="1709927" cy="365760"/>
           </a:xfrm>
           <a:prstGeom prst="rect">
             <a:avLst/>
@@ -4446,14 +4480,14 @@
           <a:p>
             <a:pPr algn="l"/>
             <a:r>
-              <a:rPr sz="1400" b="1">
+              <a:rPr sz="1200" b="1">
                 <a:solidFill>
                   <a:srgbClr val="8B1A2B"/>
                 </a:solidFill>
                 <a:latin typeface="Microsoft YaHei"/>
                 <a:ea typeface="Microsoft YaHei"/>
               </a:rPr>
-              <a:t>27B：1.34s vs 298s…</a:t>
+              <a:t>秒级故障感知</a:t>
             </a:r>
           </a:p>
         </p:txBody>
@@ -4466,8 +4500,8 @@
         </p:nvSpPr>
         <p:spPr>
           <a:xfrm>
-            <a:off x="8147304" y="4910328"/>
-            <a:ext cx="1847088" cy="868680"/>
+            <a:off x="8138156" y="4809744"/>
+            <a:ext cx="1874519" cy="960120"/>
           </a:xfrm>
           <a:prstGeom prst="rect">
             <a:avLst/>
@@ -4511,8 +4545,8 @@
         </p:nvSpPr>
         <p:spPr>
           <a:xfrm>
-            <a:off x="8257032" y="4965192"/>
-            <a:ext cx="1664208" cy="201168"/>
+            <a:off x="8229596" y="4864608"/>
+            <a:ext cx="1709927" cy="201168"/>
           </a:xfrm>
           <a:prstGeom prst="rect">
             <a:avLst/>
@@ -4534,7 +4568,7 @@
                 <a:latin typeface="Microsoft YaHei"/>
                 <a:ea typeface="Microsoft YaHei"/>
               </a:rPr>
-              <a:t>生数：数字与物理统一的…</a:t>
+              <a:t>服务启动</a:t>
             </a:r>
           </a:p>
         </p:txBody>
@@ -4547,8 +4581,8 @@
         </p:nvSpPr>
         <p:spPr>
           <a:xfrm>
-            <a:off x="8257032" y="5166360"/>
-            <a:ext cx="1664208" cy="237744"/>
+            <a:off x="8229596" y="5065776"/>
+            <a:ext cx="1709927" cy="256032"/>
           </a:xfrm>
           <a:prstGeom prst="rect">
             <a:avLst/>
@@ -4570,7 +4604,7 @@
                 <a:latin typeface="Microsoft YaHei"/>
                 <a:ea typeface="Microsoft YaHei"/>
               </a:rPr>
-              <a:t>产品线：Vidu（WGM）+ …</a:t>
+              <a:t>服务启动：34 分钟</a:t>
             </a:r>
           </a:p>
         </p:txBody>
@@ -4583,8 +4617,8 @@
         </p:nvSpPr>
         <p:spPr>
           <a:xfrm>
-            <a:off x="8257032" y="5413248"/>
-            <a:ext cx="1664208" cy="292608"/>
+            <a:off x="8229596" y="5340096"/>
+            <a:ext cx="1709927" cy="365760"/>
           </a:xfrm>
           <a:prstGeom prst="rect">
             <a:avLst/>
@@ -4599,14 +4633,14 @@
           <a:p>
             <a:pPr algn="l"/>
             <a:r>
-              <a:rPr sz="1400" b="1">
+              <a:rPr sz="1200" b="1">
                 <a:solidFill>
                   <a:srgbClr val="8B1A2B"/>
                 </a:solidFill>
                 <a:latin typeface="Microsoft YaHei"/>
                 <a:ea typeface="Microsoft YaHei"/>
               </a:rPr>
-              <a:t>产品线：Vidu（WGM）+ Mo…</a:t>
+              <a:t>2 分 20 秒（节点预热）</a:t>
             </a:r>
           </a:p>
         </p:txBody>
@@ -4619,8 +4653,8 @@
         </p:nvSpPr>
         <p:spPr>
           <a:xfrm>
-            <a:off x="10104120" y="4910328"/>
-            <a:ext cx="1847088" cy="868680"/>
+            <a:off x="10104115" y="4809744"/>
+            <a:ext cx="1874519" cy="960120"/>
           </a:xfrm>
           <a:prstGeom prst="rect">
             <a:avLst/>
@@ -4664,8 +4698,8 @@
         </p:nvSpPr>
         <p:spPr>
           <a:xfrm>
-            <a:off x="10213848" y="4965192"/>
-            <a:ext cx="1664208" cy="201168"/>
+            <a:off x="10195555" y="4864608"/>
+            <a:ext cx="1709927" cy="201168"/>
           </a:xfrm>
           <a:prstGeom prst="rect">
             <a:avLst/>
@@ -4687,7 +4721,7 @@
                 <a:latin typeface="Microsoft YaHei"/>
                 <a:ea typeface="Microsoft YaHei"/>
               </a:rPr>
-              <a:t>生数训推调度平台：基础…</a:t>
+              <a:t>KV Cache 命中率</a:t>
             </a:r>
           </a:p>
         </p:txBody>
@@ -4700,8 +4734,8 @@
         </p:nvSpPr>
         <p:spPr>
           <a:xfrm>
-            <a:off x="10213848" y="5166360"/>
-            <a:ext cx="1664208" cy="237744"/>
+            <a:off x="10195555" y="5065776"/>
+            <a:ext cx="1709927" cy="256032"/>
           </a:xfrm>
           <a:prstGeom prst="rect">
             <a:avLst/>
@@ -4723,7 +4757,7 @@
                 <a:latin typeface="Microsoft YaHei"/>
                 <a:ea typeface="Microsoft YaHei"/>
               </a:rPr>
-              <a:t>多地域：北京 / 上海 / 乌…</a:t>
+              <a:t>KV Cache 命中率：40%</a:t>
             </a:r>
           </a:p>
         </p:txBody>
@@ -4736,8 +4770,8 @@
         </p:nvSpPr>
         <p:spPr>
           <a:xfrm>
-            <a:off x="10213848" y="5413248"/>
-            <a:ext cx="1664208" cy="292608"/>
+            <a:off x="10195555" y="5340096"/>
+            <a:ext cx="1709927" cy="365760"/>
           </a:xfrm>
           <a:prstGeom prst="rect">
             <a:avLst/>
@@ -4752,14 +4786,14 @@
           <a:p>
             <a:pPr algn="l"/>
             <a:r>
-              <a:rPr sz="1400" b="1">
+              <a:rPr sz="1200" b="1">
                 <a:solidFill>
                   <a:srgbClr val="8B1A2B"/>
                 </a:solidFill>
                 <a:latin typeface="Microsoft YaHei"/>
                 <a:ea typeface="Microsoft YaHei"/>
               </a:rPr>
-              <a:t>服务启动 SLO：15 秒内</a:t>
+              <a:t>90%</a:t>
             </a:r>
           </a:p>
         </p:txBody>
@@ -4772,8 +4806,8 @@
         </p:nvSpPr>
         <p:spPr>
           <a:xfrm>
-            <a:off x="0" y="5989320"/>
-            <a:ext cx="12191695" cy="868680"/>
+            <a:off x="0" y="5870448"/>
+            <a:ext cx="12191695" cy="987552"/>
           </a:xfrm>
           <a:prstGeom prst="rect">
             <a:avLst/>
@@ -4815,8 +4849,8 @@
         </p:nvSpPr>
         <p:spPr>
           <a:xfrm>
-            <a:off x="365760" y="6080760"/>
-            <a:ext cx="11430000" cy="256032"/>
+            <a:off x="320040" y="5943600"/>
+            <a:ext cx="11521440" cy="502920"/>
           </a:xfrm>
           <a:prstGeom prst="rect">
             <a:avLst/>
@@ -4831,14 +4865,14 @@
           <a:p>
             <a:pPr algn="l"/>
             <a:r>
-              <a:rPr sz="1200" b="1">
+              <a:rPr sz="1100" b="1">
                 <a:solidFill>
                   <a:srgbClr val="1A1A1A"/>
                 </a:solidFill>
                 <a:latin typeface="Microsoft YaHei"/>
                 <a:ea typeface="Microsoft YaHei"/>
               </a:rPr>
-              <a:t>可落地动作：超节点（M890 类）必须配套拓扑 Gang、DRA Channel 隔离与秒级自愈，否则硬件规格无法转化为 Goodput。；多模态 MaaS 的关键竞争力是「15 秒级启动 + 秒级模型热切换 + 前缀/负载感知推理网关」，而非单卡峰…</a:t>
+              <a:t>可落地动作：超节点（M890 类）必须配套拓扑 Gang、DRA Channel 隔离与秒级自愈，否则硬件规格无法转化为 Goodput；多模态 MaaS 的关键竞争力是「15 秒级启动 + 秒级模型热切换 + 前缀/负载感知推理网关」，而非单卡峰值吞吐；基础池 + Serverless 突发池、多地域统一控制面与业务 SLO 驱动自治运维，是生数类客户对 HCS 的可落项对标清单。</a:t>
             </a:r>
           </a:p>
         </p:txBody>
@@ -4851,8 +4885,8 @@
         </p:nvSpPr>
         <p:spPr>
           <a:xfrm>
-            <a:off x="365760" y="6373368"/>
-            <a:ext cx="11430000" cy="256032"/>
+            <a:off x="320040" y="6437376"/>
+            <a:ext cx="11521440" cy="256032"/>
           </a:xfrm>
           <a:prstGeom prst="rect">
             <a:avLst/>
@@ -4867,7 +4901,7 @@
           <a:p>
             <a:pPr algn="l"/>
             <a:r>
-              <a:rPr sz="1000" b="0">
+              <a:rPr sz="900" b="0">
                 <a:solidFill>
                   <a:srgbClr val="6B6B6B"/>
                 </a:solidFill>
@@ -5109,7 +5143,7 @@
         <p:spPr>
           <a:xfrm>
             <a:off x="429768" y="1143000"/>
-            <a:ext cx="3496970" cy="292608"/>
+            <a:ext cx="3496970" cy="384048"/>
           </a:xfrm>
           <a:prstGeom prst="rect">
             <a:avLst/>
@@ -5131,7 +5165,7 @@
                 <a:latin typeface="Microsoft YaHei"/>
                 <a:ea typeface="Microsoft YaHei"/>
               </a:rPr>
-              <a:t>64 PPU 统一互联域</a:t>
+              <a:t>64 PPU 统一互联域 · ICN Link 800Gb/s</a:t>
             </a:r>
           </a:p>
         </p:txBody>
@@ -5152,7 +5186,7 @@
         </p:blipFill>
         <p:spPr>
           <a:xfrm>
-            <a:off x="429768" y="1928092"/>
+            <a:off x="429768" y="1946380"/>
             <a:ext cx="3496970" cy="2965239"/>
           </a:xfrm>
           <a:prstGeom prst="rect">
@@ -5191,7 +5225,7 @@
                 <a:latin typeface="Microsoft YaHei"/>
                 <a:ea typeface="Microsoft YaHei"/>
               </a:rPr>
-              <a:t>ACK 支持真武 M890：拓扑感知 · DRA · …</a:t>
+              <a:t>ACK 支持真武 M890：拓扑感知 · DRA · 可观测 · 自愈</a:t>
             </a:r>
           </a:p>
         </p:txBody>
@@ -5250,7 +5284,7 @@
         <p:spPr>
           <a:xfrm>
             <a:off x="4347362" y="1143000"/>
-            <a:ext cx="3496970" cy="292608"/>
+            <a:ext cx="3496970" cy="384048"/>
           </a:xfrm>
           <a:prstGeom prst="rect">
             <a:avLst/>
@@ -5272,7 +5306,7 @@
                 <a:latin typeface="Microsoft YaHei"/>
                 <a:ea typeface="Microsoft YaHei"/>
               </a:rPr>
-              <a:t>同资源吞吐约 3x（相对开源）</a:t>
+              <a:t>服务启动：34 分钟 → 2 分 20 秒（节点预热） · KV Cache 命中率：40% → 90%</a:t>
             </a:r>
           </a:p>
         </p:txBody>
@@ -5293,7 +5327,7 @@
         </p:blipFill>
         <p:spPr>
           <a:xfrm>
-            <a:off x="4347362" y="1928092"/>
+            <a:off x="4347362" y="1946380"/>
             <a:ext cx="3496970" cy="2965239"/>
           </a:xfrm>
           <a:prstGeom prst="rect">
@@ -5332,7 +5366,7 @@
                 <a:latin typeface="Microsoft YaHei"/>
                 <a:ea typeface="Microsoft YaHei"/>
               </a:rPr>
-              <a:t>ACK AI 推理套件 + 真武 M890：PD 分离…</a:t>
+              <a:t>ACK AI 推理套件 + 真武 M890：PD 分离与前缀感知路由</a:t>
             </a:r>
           </a:p>
         </p:txBody>
@@ -5391,7 +5425,7 @@
         <p:spPr>
           <a:xfrm>
             <a:off x="8264956" y="1143000"/>
-            <a:ext cx="3496970" cy="292608"/>
+            <a:ext cx="3496970" cy="384048"/>
           </a:xfrm>
           <a:prstGeom prst="rect">
             <a:avLst/>
@@ -5413,7 +5447,7 @@
                 <a:latin typeface="Microsoft YaHei"/>
                 <a:ea typeface="Microsoft YaHei"/>
               </a:rPr>
-              <a:t>卡级隔离：单坏卡不废整机</a:t>
+              <a:t>目标指标：Goodput（有效算力时长比例） · 卡级隔离：单坏卡不废整机</a:t>
             </a:r>
           </a:p>
         </p:txBody>
@@ -5434,7 +5468,7 @@
         </p:blipFill>
         <p:spPr>
           <a:xfrm>
-            <a:off x="8264956" y="1928092"/>
+            <a:off x="8264956" y="1946380"/>
             <a:ext cx="3496970" cy="2965239"/>
           </a:xfrm>
           <a:prstGeom prst="rect">

--- a/yunqi-2026-agenda-201/docs/洞察一页-06-容器智算底座助力生数科技多模态 AI.pptx
+++ b/yunqi-2026-agenda-201/docs/洞察一页-06-容器智算底座助力生数科技多模态 AI.pptx
@@ -3323,7 +3323,7 @@
                 <a:latin typeface="Microsoft YaHei"/>
                 <a:ea typeface="Microsoft YaHei"/>
               </a:rPr>
-              <a:t>一句话判断：本场为容器智算底座与生数科技联合实践：ACK 侧给出真武 M890 超节点调度/DRA/可观测/自愈、PD 分离推理套件、异构故障自愈与多模型 GPU 热切换能力；生数侧介绍 Vidu/Motusion 通用世界模型路线，以及基于 ACK Pro + ACS Serverless 的多地域训推调度平台（服务启动 SLO 15 秒、首帧时延可观测），并以高峰弹性、模型切换、GPU 故障与多集群调度四大挑战收束。</a:t>
+              <a:t>一句话判断：生数科技 ACK / Vidu——真武 M890 超节点调度/DRA/可观测/自愈、PD 分离推理套件、异构故障自愈与多模型 GPU 热切换能力； Vidu/Motusion 通用世界模型路线，以及基于 ACK Pro + ACS Serverless 的多地域训推调度平台（服务启动 SLO 15 秒、首帧时延可观测），并以高峰弹性、模型切换、GPU 故障与多集群调度四大挑战收束。</a:t>
             </a:r>
           </a:p>
         </p:txBody>
@@ -3444,7 +3444,7 @@
                 <a:latin typeface="Microsoft YaHei"/>
                 <a:ea typeface="Microsoft YaHei"/>
               </a:rPr>
-              <a:t>HCS 超节点/AI 集群规划需把拓扑亲和 Gang 调度与 DRA/CDI 多 Channel 隔离做成默认能力，而不是事后人工绑核</a:t>
+              <a:t>超节点/AI 集群规划需把拓扑亲和 Gang 调度与 DRA/CDI 多 Channel 隔离做成默认能力，而不是事后人工绑核</a:t>
             </a:r>
           </a:p>
           <a:p>
@@ -3616,7 +3616,7 @@
                 <a:latin typeface="Microsoft YaHei"/>
                 <a:ea typeface="Microsoft YaHei"/>
               </a:rPr>
-              <a:t>HCS 推理产品应把 PD 分离 + Session/前缀感知路由做成一等公民，对外暴露 KV 命中率/TTFT/会话 SLO</a:t>
+              <a:t>推理产品应把 PD 分离 + Session/前缀感知路由做成一等公民，对外暴露 KV 命中率/TTFT/会话 SLO</a:t>
             </a:r>
           </a:p>
           <a:p>
@@ -3788,7 +3788,7 @@
                 <a:latin typeface="Microsoft YaHei"/>
                 <a:ea typeface="Microsoft YaHei"/>
               </a:rPr>
-              <a:t>HCS 应将 Goodput 纳入 AI 集群运维 KPI，并把多源硬件事件统一映射为 K8s Condition</a:t>
+              <a:t>将 Goodput 纳入 AI 集群运维 KPI，并把多源硬件事件统一映射为 K8s Condition</a:t>
             </a:r>
           </a:p>
           <a:p>
@@ -3956,7 +3956,7 @@
                 <a:latin typeface="Microsoft YaHei"/>
                 <a:ea typeface="Microsoft YaHei"/>
               </a:rPr>
-              <a:t>ACK 支持真武 M890</a:t>
+              <a:t>服务可用性</a:t>
             </a:r>
           </a:p>
         </p:txBody>
@@ -3992,7 +3992,7 @@
                 <a:latin typeface="Microsoft YaHei"/>
                 <a:ea typeface="Microsoft YaHei"/>
               </a:rPr>
-              <a:t>演讲口径</a:t>
+              <a:t>挑战与解法</a:t>
             </a:r>
           </a:p>
         </p:txBody>
@@ -4028,7 +4028,7 @@
                 <a:latin typeface="Microsoft YaHei"/>
                 <a:ea typeface="Microsoft YaHei"/>
               </a:rPr>
-              <a:t>64 PPU 统一互联域</a:t>
+              <a:t>99.9%</a:t>
             </a:r>
           </a:p>
         </p:txBody>
@@ -4109,7 +4109,7 @@
                 <a:latin typeface="Microsoft YaHei"/>
                 <a:ea typeface="Microsoft YaHei"/>
               </a:rPr>
-              <a:t>ACK 支持真武 M890·2</a:t>
+              <a:t>PD 分离与前缀感知路由</a:t>
             </a:r>
           </a:p>
         </p:txBody>
@@ -4145,7 +4145,7 @@
                 <a:latin typeface="Microsoft YaHei"/>
                 <a:ea typeface="Microsoft YaHei"/>
               </a:rPr>
-              <a:t>演讲口径</a:t>
+              <a:t>关键能力</a:t>
             </a:r>
           </a:p>
         </p:txBody>
@@ -4181,7 +4181,7 @@
                 <a:latin typeface="Microsoft YaHei"/>
                 <a:ea typeface="Microsoft YaHei"/>
               </a:rPr>
-              <a:t>ICN Link 800Gb/s</a:t>
+              <a:t>同资源吞吐约 3x（相对开源）</a:t>
             </a:r>
           </a:p>
         </p:txBody>
@@ -4262,7 +4262,7 @@
                 <a:latin typeface="Microsoft YaHei"/>
                 <a:ea typeface="Microsoft YaHei"/>
               </a:rPr>
-              <a:t>ACK 支持真武 M890·3</a:t>
+              <a:t>挑战与解法</a:t>
             </a:r>
           </a:p>
         </p:txBody>
@@ -4298,7 +4298,7 @@
                 <a:latin typeface="Microsoft YaHei"/>
                 <a:ea typeface="Microsoft YaHei"/>
               </a:rPr>
-              <a:t>演讲口径</a:t>
+              <a:t>关键能力</a:t>
             </a:r>
           </a:p>
         </p:txBody>
@@ -4334,7 +4334,7 @@
                 <a:latin typeface="Microsoft YaHei"/>
                 <a:ea typeface="Microsoft YaHei"/>
               </a:rPr>
-              <a:t>80+ 标准 Prometheus 指标</a:t>
+              <a:t>硬件故障自愈率 &gt;99%（配套自愈实践）</a:t>
             </a:r>
           </a:p>
         </p:txBody>
@@ -4415,7 +4415,7 @@
                 <a:latin typeface="Microsoft YaHei"/>
                 <a:ea typeface="Microsoft YaHei"/>
               </a:rPr>
-              <a:t>ACK 支持真武 M890·4</a:t>
+              <a:t>PD 分离与前缀感知路由</a:t>
             </a:r>
           </a:p>
         </p:txBody>
@@ -4451,7 +4451,7 @@
                 <a:latin typeface="Microsoft YaHei"/>
                 <a:ea typeface="Microsoft YaHei"/>
               </a:rPr>
-              <a:t>演讲口径</a:t>
+              <a:t>KV Cache 命中率：40%</a:t>
             </a:r>
           </a:p>
         </p:txBody>
@@ -4487,7 +4487,7 @@
                 <a:latin typeface="Microsoft YaHei"/>
                 <a:ea typeface="Microsoft YaHei"/>
               </a:rPr>
-              <a:t>秒级故障感知</a:t>
+              <a:t>90%</a:t>
             </a:r>
           </a:p>
         </p:txBody>
@@ -4568,7 +4568,7 @@
                 <a:latin typeface="Microsoft YaHei"/>
                 <a:ea typeface="Microsoft YaHei"/>
               </a:rPr>
-              <a:t>服务启动</a:t>
+              <a:t>27B</a:t>
             </a:r>
           </a:p>
         </p:txBody>
@@ -4604,7 +4604,7 @@
                 <a:latin typeface="Microsoft YaHei"/>
                 <a:ea typeface="Microsoft YaHei"/>
               </a:rPr>
-              <a:t>服务启动：34 分钟</a:t>
+              <a:t>MaaS 长尾模型秒级切换</a:t>
             </a:r>
           </a:p>
         </p:txBody>
@@ -4640,7 +4640,7 @@
                 <a:latin typeface="Microsoft YaHei"/>
                 <a:ea typeface="Microsoft YaHei"/>
               </a:rPr>
-              <a:t>2 分 20 秒（节点预热）</a:t>
+              <a:t>1.34s vs 298s（~222x）</a:t>
             </a:r>
           </a:p>
         </p:txBody>
@@ -4721,7 +4721,7 @@
                 <a:latin typeface="Microsoft YaHei"/>
                 <a:ea typeface="Microsoft YaHei"/>
               </a:rPr>
-              <a:t>KV Cache 命中率</a:t>
+              <a:t>72B</a:t>
             </a:r>
           </a:p>
         </p:txBody>
@@ -4757,7 +4757,7 @@
                 <a:latin typeface="Microsoft YaHei"/>
                 <a:ea typeface="Microsoft YaHei"/>
               </a:rPr>
-              <a:t>KV Cache 命中率：40%</a:t>
+              <a:t>MaaS 长尾模型秒级切换</a:t>
             </a:r>
           </a:p>
         </p:txBody>
@@ -4793,7 +4793,7 @@
                 <a:latin typeface="Microsoft YaHei"/>
                 <a:ea typeface="Microsoft YaHei"/>
               </a:rPr>
-              <a:t>90%</a:t>
+              <a:t>1.87s vs 311s（~166x）</a:t>
             </a:r>
           </a:p>
         </p:txBody>
@@ -4872,7 +4872,7 @@
                 <a:latin typeface="Microsoft YaHei"/>
                 <a:ea typeface="Microsoft YaHei"/>
               </a:rPr>
-              <a:t>可落地动作：超节点（M890 类）必须配套拓扑 Gang、DRA Channel 隔离与秒级自愈，否则硬件规格无法转化为 Goodput；多模态 MaaS 的关键竞争力是「15 秒级启动 + 秒级模型热切换 + 前缀/负载感知推理网关」，而非单卡峰值吞吐；基础池 + Serverless 突发池、多地域统一控制面与业务 SLO 驱动自治运维，是生数类客户对 HCS 的可落项对标清单。</a:t>
+              <a:t>启示要点：超节点（M890 类）必须配套拓扑 Gang、DRA Channel 隔离与秒级自愈，否则硬件规格无法转化为 Goodput；多模态 MaaS 的关键竞争力是「15 秒级启动 + 秒级模型热切换 + 前缀/负载感知推理网关」，而非单卡峰值吞吐；基础池 + Serverless 突发池、多地域统一控制面与业务 SLO 驱动自治运维，是生数类客户对 的可落项对标清单。</a:t>
             </a:r>
           </a:p>
         </p:txBody>
@@ -4908,7 +4908,7 @@
                 <a:latin typeface="Microsoft YaHei"/>
                 <a:ea typeface="Microsoft YaHei"/>
               </a:rPr>
-              <a:t>来源：https://yunqi.aliyun.com/2026/session?agendaId=201 · Talk 06 张凯 / 姚峥  ·  视角：HCS 技术规划</a:t>
+              <a:t>来源：https://yunqi.aliyun.com/2026/session?agendaId=201 · Talk 06 张凯 / 姚峥</a:t>
             </a:r>
           </a:p>
         </p:txBody>
